--- a/tailieu/BaoCao_TienDo_DATN_HoangMinhDuc_2200583.pptx
+++ b/tailieu/BaoCao_TienDo_DATN_HoangMinhDuc_2200583.pptx
@@ -488,6 +488,654 @@
 </pc:chgInfo>
 </file>
 
+<file path=ppt/notesMasters/notesMaster1.xml><?xml version="1.0" encoding="utf-8"?>
+<p:notesMaster xmlns:a="http://schemas.openxmlformats.org/drawingml/2006/main" xmlns:p="http://schemas.openxmlformats.org/presentationml/2006/main" xmlns:r="http://schemas.openxmlformats.org/officeDocument/2006/relationships">
+  <p:cSld>
+    <p:bg>
+      <p:bgRef idx="1001">
+        <a:schemeClr val="bg1"/>
+      </p:bgRef>
+    </p:bg>
+    <p:spTree>
+      <p:nvGrpSpPr>
+        <p:cNvPr id="1" name=""/>
+        <p:cNvGrpSpPr/>
+        <p:nvPr/>
+      </p:nvGrpSpPr>
+      <p:grpSpPr>
+        <a:xfrm>
+          <a:off x="0" y="0"/>
+          <a:ext cx="0" cy="0"/>
+          <a:chOff x="0" y="0"/>
+          <a:chExt cx="0" cy="0"/>
+        </a:xfrm>
+      </p:grpSpPr>
+      <p:sp>
+        <p:nvSpPr>
+          <p:cNvPr id="2" name="Header Placeholder 1"/>
+          <p:cNvSpPr>
+            <a:spLocks noGrp="1"/>
+          </p:cNvSpPr>
+          <p:nvPr>
+            <p:ph type="hdr" sz="quarter"/>
+          </p:nvPr>
+        </p:nvSpPr>
+        <p:spPr>
+          <a:xfrm>
+            <a:off x="0" y="0"/>
+            <a:ext cx="2971800" cy="457200"/>
+          </a:xfrm>
+          <a:prstGeom prst="rect">
+            <a:avLst/>
+          </a:prstGeom>
+        </p:spPr>
+        <p:txBody>
+          <a:bodyPr vert="horz" lIns="91440" tIns="45720" rIns="91440" bIns="45720" rtlCol="0"/>
+          <a:lstStyle>
+            <a:lvl1pPr algn="l">
+              <a:defRPr sz="1200"/>
+            </a:lvl1pPr>
+          </a:lstStyle>
+          <a:p>
+            <a:endParaRPr lang="en-US"/>
+          </a:p>
+        </p:txBody>
+      </p:sp>
+      <p:sp>
+        <p:nvSpPr>
+          <p:cNvPr id="3" name="Date Placeholder 2"/>
+          <p:cNvSpPr>
+            <a:spLocks noGrp="1"/>
+          </p:cNvSpPr>
+          <p:nvPr>
+            <p:ph type="dt" idx="1"/>
+          </p:nvPr>
+        </p:nvSpPr>
+        <p:spPr>
+          <a:xfrm>
+            <a:off x="3884613" y="0"/>
+            <a:ext cx="2971800" cy="457200"/>
+          </a:xfrm>
+          <a:prstGeom prst="rect">
+            <a:avLst/>
+          </a:prstGeom>
+        </p:spPr>
+        <p:txBody>
+          <a:bodyPr vert="horz" lIns="91440" tIns="45720" rIns="91440" bIns="45720" rtlCol="0"/>
+          <a:lstStyle>
+            <a:lvl1pPr algn="r">
+              <a:defRPr sz="1200"/>
+            </a:lvl1pPr>
+          </a:lstStyle>
+          <a:p>
+            <a:fld id="{0F89C1C7-3DCD-1040-A9CF-14679D8B5DDD}" type="datetimeFigureOut">
+              <a:rPr lang="en-US" smtClean="0"/>
+              <a:t>10/17/16</a:t>
+            </a:fld>
+            <a:endParaRPr lang="en-US"/>
+          </a:p>
+        </p:txBody>
+      </p:sp>
+      <p:sp>
+        <p:nvSpPr>
+          <p:cNvPr id="4" name="Slide Image Placeholder 3"/>
+          <p:cNvSpPr>
+            <a:spLocks noGrp="1" noRot="1" noChangeAspect="1"/>
+          </p:cNvSpPr>
+          <p:nvPr>
+            <p:ph type="sldImg" idx="2"/>
+          </p:nvPr>
+        </p:nvSpPr>
+        <p:spPr>
+          <a:xfrm>
+            <a:off x="1143000" y="685800"/>
+            <a:ext cx="4572000" cy="3429000"/>
+          </a:xfrm>
+          <a:prstGeom prst="rect">
+            <a:avLst/>
+          </a:prstGeom>
+          <a:noFill/>
+          <a:ln w="12700">
+            <a:solidFill>
+              <a:prstClr val="black"/>
+            </a:solidFill>
+          </a:ln>
+        </p:spPr>
+        <p:txBody>
+          <a:bodyPr vert="horz" lIns="91440" tIns="45720" rIns="91440" bIns="45720" rtlCol="0" anchor="ctr"/>
+          <a:lstStyle/>
+          <a:p>
+            <a:endParaRPr lang="en-US"/>
+          </a:p>
+        </p:txBody>
+      </p:sp>
+      <p:sp>
+        <p:nvSpPr>
+          <p:cNvPr id="5" name="Notes Placeholder 4"/>
+          <p:cNvSpPr>
+            <a:spLocks noGrp="1"/>
+          </p:cNvSpPr>
+          <p:nvPr>
+            <p:ph type="body" sz="quarter" idx="3"/>
+          </p:nvPr>
+        </p:nvSpPr>
+        <p:spPr>
+          <a:xfrm>
+            <a:off x="685800" y="4343400"/>
+            <a:ext cx="5486400" cy="4114800"/>
+          </a:xfrm>
+          <a:prstGeom prst="rect">
+            <a:avLst/>
+          </a:prstGeom>
+        </p:spPr>
+        <p:txBody>
+          <a:bodyPr vert="horz" lIns="91440" tIns="45720" rIns="91440" bIns="45720" rtlCol="0"/>
+          <a:lstStyle/>
+          <a:p>
+            <a:pPr lvl="0"/>
+            <a:r>
+              <a:rPr lang="en-US" smtClean="0"/>
+              <a:t>Click to edit Master text styles</a:t>
+            </a:r>
+          </a:p>
+          <a:p>
+            <a:pPr lvl="1"/>
+            <a:r>
+              <a:rPr lang="en-US" smtClean="0"/>
+              <a:t>Second level</a:t>
+            </a:r>
+          </a:p>
+          <a:p>
+            <a:pPr lvl="2"/>
+            <a:r>
+              <a:rPr lang="en-US" smtClean="0"/>
+              <a:t>Third level</a:t>
+            </a:r>
+          </a:p>
+          <a:p>
+            <a:pPr lvl="3"/>
+            <a:r>
+              <a:rPr lang="en-US" smtClean="0"/>
+              <a:t>Fourth level</a:t>
+            </a:r>
+          </a:p>
+          <a:p>
+            <a:pPr lvl="4"/>
+            <a:r>
+              <a:rPr lang="en-US" smtClean="0"/>
+              <a:t>Fifth level</a:t>
+            </a:r>
+            <a:endParaRPr lang="en-US"/>
+          </a:p>
+        </p:txBody>
+      </p:sp>
+      <p:sp>
+        <p:nvSpPr>
+          <p:cNvPr id="6" name="Footer Placeholder 5"/>
+          <p:cNvSpPr>
+            <a:spLocks noGrp="1"/>
+          </p:cNvSpPr>
+          <p:nvPr>
+            <p:ph type="ftr" sz="quarter" idx="4"/>
+          </p:nvPr>
+        </p:nvSpPr>
+        <p:spPr>
+          <a:xfrm>
+            <a:off x="0" y="8685213"/>
+            <a:ext cx="2971800" cy="457200"/>
+          </a:xfrm>
+          <a:prstGeom prst="rect">
+            <a:avLst/>
+          </a:prstGeom>
+        </p:spPr>
+        <p:txBody>
+          <a:bodyPr vert="horz" lIns="91440" tIns="45720" rIns="91440" bIns="45720" rtlCol="0" anchor="b"/>
+          <a:lstStyle>
+            <a:lvl1pPr algn="l">
+              <a:defRPr sz="1200"/>
+            </a:lvl1pPr>
+          </a:lstStyle>
+          <a:p>
+            <a:endParaRPr lang="en-US"/>
+          </a:p>
+        </p:txBody>
+      </p:sp>
+      <p:sp>
+        <p:nvSpPr>
+          <p:cNvPr id="7" name="Slide Number Placeholder 6"/>
+          <p:cNvSpPr>
+            <a:spLocks noGrp="1"/>
+          </p:cNvSpPr>
+          <p:nvPr>
+            <p:ph type="sldNum" sz="quarter" idx="5"/>
+          </p:nvPr>
+        </p:nvSpPr>
+        <p:spPr>
+          <a:xfrm>
+            <a:off x="3884613" y="8685213"/>
+            <a:ext cx="2971800" cy="457200"/>
+          </a:xfrm>
+          <a:prstGeom prst="rect">
+            <a:avLst/>
+          </a:prstGeom>
+        </p:spPr>
+        <p:txBody>
+          <a:bodyPr vert="horz" lIns="91440" tIns="45720" rIns="91440" bIns="45720" rtlCol="0" anchor="b"/>
+          <a:lstStyle>
+            <a:lvl1pPr algn="r">
+              <a:defRPr sz="1200"/>
+            </a:lvl1pPr>
+          </a:lstStyle>
+          <a:p>
+            <a:fld id="{BB5E49A5-4136-284D-997B-48E1D791AD67}" type="slidenum">
+              <a:rPr lang="en-US" smtClean="0"/>
+              <a:t>‹#›</a:t>
+            </a:fld>
+            <a:endParaRPr lang="en-US"/>
+          </a:p>
+        </p:txBody>
+      </p:sp>
+    </p:spTree>
+    <p:extLst>
+      <p:ext uri="{BB962C8B-B14F-4D97-AF65-F5344CB8AC3E}">
+        <p14:creationId xmlns:p14="http://schemas.microsoft.com/office/powerpoint/2010/main" val="2623252185"/>
+      </p:ext>
+    </p:extLst>
+  </p:cSld>
+  <p:clrMap bg1="lt1" tx1="dk1" bg2="lt2" tx2="dk2" accent1="accent1" accent2="accent2" accent3="accent3" accent4="accent4" accent5="accent5" accent6="accent6" hlink="hlink" folHlink="folHlink"/>
+  <p:notesStyle>
+    <a:lvl1pPr marL="0" algn="l" defTabSz="457200" rtl="0" eaLnBrk="1" latinLnBrk="0" hangingPunct="1">
+      <a:defRPr sz="1200" kern="1200">
+        <a:solidFill>
+          <a:schemeClr val="tx1"/>
+        </a:solidFill>
+        <a:latin typeface="+mn-lt"/>
+        <a:ea typeface="+mn-ea"/>
+        <a:cs typeface="+mn-cs"/>
+      </a:defRPr>
+    </a:lvl1pPr>
+    <a:lvl2pPr marL="457200" algn="l" defTabSz="457200" rtl="0" eaLnBrk="1" latinLnBrk="0" hangingPunct="1">
+      <a:defRPr sz="1200" kern="1200">
+        <a:solidFill>
+          <a:schemeClr val="tx1"/>
+        </a:solidFill>
+        <a:latin typeface="+mn-lt"/>
+        <a:ea typeface="+mn-ea"/>
+        <a:cs typeface="+mn-cs"/>
+      </a:defRPr>
+    </a:lvl2pPr>
+    <a:lvl3pPr marL="914400" algn="l" defTabSz="457200" rtl="0" eaLnBrk="1" latinLnBrk="0" hangingPunct="1">
+      <a:defRPr sz="1200" kern="1200">
+        <a:solidFill>
+          <a:schemeClr val="tx1"/>
+        </a:solidFill>
+        <a:latin typeface="+mn-lt"/>
+        <a:ea typeface="+mn-ea"/>
+        <a:cs typeface="+mn-cs"/>
+      </a:defRPr>
+    </a:lvl3pPr>
+    <a:lvl4pPr marL="1371600" algn="l" defTabSz="457200" rtl="0" eaLnBrk="1" latinLnBrk="0" hangingPunct="1">
+      <a:defRPr sz="1200" kern="1200">
+        <a:solidFill>
+          <a:schemeClr val="tx1"/>
+        </a:solidFill>
+        <a:latin typeface="+mn-lt"/>
+        <a:ea typeface="+mn-ea"/>
+        <a:cs typeface="+mn-cs"/>
+      </a:defRPr>
+    </a:lvl4pPr>
+    <a:lvl5pPr marL="1828800" algn="l" defTabSz="457200" rtl="0" eaLnBrk="1" latinLnBrk="0" hangingPunct="1">
+      <a:defRPr sz="1200" kern="1200">
+        <a:solidFill>
+          <a:schemeClr val="tx1"/>
+        </a:solidFill>
+        <a:latin typeface="+mn-lt"/>
+        <a:ea typeface="+mn-ea"/>
+        <a:cs typeface="+mn-cs"/>
+      </a:defRPr>
+    </a:lvl5pPr>
+    <a:lvl6pPr marL="2286000" algn="l" defTabSz="457200" rtl="0" eaLnBrk="1" latinLnBrk="0" hangingPunct="1">
+      <a:defRPr sz="1200" kern="1200">
+        <a:solidFill>
+          <a:schemeClr val="tx1"/>
+        </a:solidFill>
+        <a:latin typeface="+mn-lt"/>
+        <a:ea typeface="+mn-ea"/>
+        <a:cs typeface="+mn-cs"/>
+      </a:defRPr>
+    </a:lvl6pPr>
+    <a:lvl7pPr marL="2743200" algn="l" defTabSz="457200" rtl="0" eaLnBrk="1" latinLnBrk="0" hangingPunct="1">
+      <a:defRPr sz="1200" kern="1200">
+        <a:solidFill>
+          <a:schemeClr val="tx1"/>
+        </a:solidFill>
+        <a:latin typeface="+mn-lt"/>
+        <a:ea typeface="+mn-ea"/>
+        <a:cs typeface="+mn-cs"/>
+      </a:defRPr>
+    </a:lvl7pPr>
+    <a:lvl8pPr marL="3200400" algn="l" defTabSz="457200" rtl="0" eaLnBrk="1" latinLnBrk="0" hangingPunct="1">
+      <a:defRPr sz="1200" kern="1200">
+        <a:solidFill>
+          <a:schemeClr val="tx1"/>
+        </a:solidFill>
+        <a:latin typeface="+mn-lt"/>
+        <a:ea typeface="+mn-ea"/>
+        <a:cs typeface="+mn-cs"/>
+      </a:defRPr>
+    </a:lvl8pPr>
+    <a:lvl9pPr marL="3657600" algn="l" defTabSz="457200" rtl="0" eaLnBrk="1" latinLnBrk="0" hangingPunct="1">
+      <a:defRPr sz="1200" kern="1200">
+        <a:solidFill>
+          <a:schemeClr val="tx1"/>
+        </a:solidFill>
+        <a:latin typeface="+mn-lt"/>
+        <a:ea typeface="+mn-ea"/>
+        <a:cs typeface="+mn-cs"/>
+      </a:defRPr>
+    </a:lvl9pPr>
+  </p:notesStyle>
+</p:notesMaster>
+</file>
+
+<file path=ppt/notesSlides/notesSlide1.xml><?xml version="1.0" encoding="utf-8"?>
+<p:notes xmlns:a="http://schemas.openxmlformats.org/drawingml/2006/main" xmlns:p="http://schemas.openxmlformats.org/presentationml/2006/main" xmlns:r="http://schemas.openxmlformats.org/officeDocument/2006/relationships">
+  <p:cSld>
+    <p:spTree>
+      <p:nvGrpSpPr>
+        <p:cNvPr id="1" name=""/>
+        <p:cNvGrpSpPr/>
+        <p:nvPr/>
+      </p:nvGrpSpPr>
+      <p:grpSpPr>
+        <a:xfrm>
+          <a:off x="0" y="0"/>
+          <a:ext cx="0" cy="0"/>
+          <a:chOff x="0" y="0"/>
+          <a:chExt cx="0" cy="0"/>
+        </a:xfrm>
+      </p:grpSpPr>
+      <p:sp>
+        <p:nvSpPr>
+          <p:cNvPr id="2" name="Slide Image Placeholder 1"/>
+          <p:cNvSpPr>
+            <a:spLocks noGrp="1"/>
+          </p:cNvSpPr>
+          <p:nvPr>
+            <p:ph type="sldImg" idx="2"/>
+          </p:nvPr>
+        </p:nvSpPr>
+        <p:spPr/>
+      </p:sp>
+      <p:sp>
+        <p:nvSpPr>
+          <p:cNvPr id="3" name="Notes Placeholder 2"/>
+          <p:cNvSpPr>
+            <a:spLocks noGrp="1"/>
+          </p:cNvSpPr>
+          <p:nvPr>
+            <p:ph type="body" idx="3" sz="quarter"/>
+          </p:nvPr>
+        </p:nvSpPr>
+        <p:spPr/>
+        <p:txBody>
+          <a:bodyPr/>
+          <a:lstStyle/>
+          <a:p>
+            <a:r>
+              <a:rPr sz="1200"/>
+              <a:t>MỞ ĐẦU — Sơ đồ này đọc theo chiều dọc: ba cột là ba mặt phẳng tin cậy, không phải ba tầng kỹ thuật. Chia theo mức tin cậy chứ không theo công nghệ.</a:t>
+            </a:r>
+          </a:p>
+          <a:p>
+            <a:r>
+              <a:rPr sz="1200"/>
+              <a:t/>
+            </a:r>
+          </a:p>
+          <a:p>
+            <a:r>
+              <a:rPr sz="1200"/>
+              <a:t>CỘT TRÁI — mặt phẳng ứng viên. Công khai, không cần tài khoản. Đây là nơi khách trò chuyện, gửi CV, xem đơn được gợi ý và đặt lịch. Mọi thứ khách gửi lên đều coi là chưa đáng tin cho tới khi được kiểm.</a:t>
+            </a:r>
+          </a:p>
+          <a:p>
+            <a:r>
+              <a:rPr sz="1200"/>
+              <a:t/>
+            </a:r>
+          </a:p>
+          <a:p>
+            <a:r>
+              <a:rPr sz="1200"/>
+              <a:t>CỘT GIỮA — lõi xử lý. Toàn bộ nghiệp vụ tự động nằm ở đây: tiếp nhận câu hỏi, đọc CV, tra cứu tài liệu, kiểm chứng câu trả lời trước khi gửi đi. Ô viền vàng ở giữa là bộ đối chiếu đơn hàng — em sẽ nói kỹ ở slide sau.</a:t>
+            </a:r>
+          </a:p>
+          <a:p>
+            <a:r>
+              <a:rPr sz="1200"/>
+              <a:t/>
+            </a:r>
+          </a:p>
+          <a:p>
+            <a:r>
+              <a:rPr sz="1200"/>
+              <a:t>CỘT PHẢI — phân hệ quản trị. Nhân viên làm việc ở đây, bắt buộc đăng nhập.</a:t>
+            </a:r>
+          </a:p>
+          <a:p>
+            <a:r>
+              <a:rPr sz="1200"/>
+              <a:t/>
+            </a:r>
+          </a:p>
+          <a:p>
+            <a:r>
+              <a:rPr sz="1200"/>
+              <a:t>HAI ĐIỂM EM MUỐN NHẤN:</a:t>
+            </a:r>
+          </a:p>
+          <a:p>
+            <a:r>
+              <a:rPr sz="1200"/>
+              <a:t/>
+            </a:r>
+          </a:p>
+          <a:p>
+            <a:r>
+              <a:rPr sz="1200"/>
+              <a:t>Thứ nhất — ô 'RANH GIỚI QUAN TRỌNG NHẤT' ở góc dưới bên trái. Mặt phẳng ứng viên KHÔNG có đường đi trực tiếp nào tới mặt phẳng quản trị. Dữ liệu chỉ chuyển giao gián tiếp qua kho, nên một người dùng bên ngoài không thể xem hay sửa dữ liệu nội bộ, kể cả khi họ đoán đúng địa chỉ.</a:t>
+            </a:r>
+          </a:p>
+          <a:p>
+            <a:r>
+              <a:rPr sz="1200"/>
+              <a:t/>
+            </a:r>
+          </a:p>
+          <a:p>
+            <a:r>
+              <a:rPr sz="1200"/>
+              <a:t>Thứ hai — dòng viền đứt ở đáy cột giữa: 'dịch vụ mô hình ngôn ngữ ngoài'. Nó nằm NGOÀI lõi và chỉ làm một việc là diễn đạt câu trả lời. Nó không ra quyết định nghiệp vụ nào. Phần quyết định ai đạt, ai không đạt nằm ở ô viền vàng, và đó là quy tắc viết sẵn — cùng một hồ sơ luôn cho cùng một kết quả, và giải thích được từng dòng.</a:t>
+            </a:r>
+          </a:p>
+          <a:p>
+            <a:r>
+              <a:rPr sz="1200"/>
+              <a:t/>
+            </a:r>
+          </a:p>
+          <a:p>
+            <a:r>
+              <a:rPr sz="1200"/>
+              <a:t>CHỐT — Nếu chỉ nhớ một điều từ slide này: AI ở đây diễn đạt, không phán xử.</a:t>
+            </a:r>
+          </a:p>
+        </p:txBody>
+      </p:sp>
+      <p:sp>
+        <p:nvSpPr>
+          <p:cNvPr id="4" name="Slide Number Placeholder 3"/>
+          <p:cNvSpPr>
+            <a:spLocks noGrp="1"/>
+          </p:cNvSpPr>
+          <p:nvPr>
+            <p:ph type="sldNum" idx="5" sz="quarter"/>
+          </p:nvPr>
+        </p:nvSpPr>
+        <p:spPr/>
+      </p:sp>
+    </p:spTree>
+  </p:cSld>
+  <p:clrMapOvr>
+    <a:masterClrMapping/>
+  </p:clrMapOvr>
+</p:notes>
+</file>
+
+<file path=ppt/notesSlides/notesSlide2.xml><?xml version="1.0" encoding="utf-8"?>
+<p:notes xmlns:a="http://schemas.openxmlformats.org/drawingml/2006/main" xmlns:p="http://schemas.openxmlformats.org/presentationml/2006/main" xmlns:r="http://schemas.openxmlformats.org/officeDocument/2006/relationships">
+  <p:cSld>
+    <p:spTree>
+      <p:nvGrpSpPr>
+        <p:cNvPr id="1" name=""/>
+        <p:cNvGrpSpPr/>
+        <p:nvPr/>
+      </p:nvGrpSpPr>
+      <p:grpSpPr>
+        <a:xfrm>
+          <a:off x="0" y="0"/>
+          <a:ext cx="0" cy="0"/>
+          <a:chOff x="0" y="0"/>
+          <a:chExt cx="0" cy="0"/>
+        </a:xfrm>
+      </p:grpSpPr>
+      <p:sp>
+        <p:nvSpPr>
+          <p:cNvPr id="2" name="Slide Image Placeholder 1"/>
+          <p:cNvSpPr>
+            <a:spLocks noGrp="1"/>
+          </p:cNvSpPr>
+          <p:nvPr>
+            <p:ph type="sldImg" idx="2"/>
+          </p:nvPr>
+        </p:nvSpPr>
+        <p:spPr/>
+      </p:sp>
+      <p:sp>
+        <p:nvSpPr>
+          <p:cNvPr id="3" name="Notes Placeholder 2"/>
+          <p:cNvSpPr>
+            <a:spLocks noGrp="1"/>
+          </p:cNvSpPr>
+          <p:nvPr>
+            <p:ph type="body" idx="3" sz="quarter"/>
+          </p:nvPr>
+        </p:nvSpPr>
+        <p:spPr/>
+        <p:txBody>
+          <a:bodyPr/>
+          <a:lstStyle/>
+          <a:p>
+            <a:r>
+              <a:rPr sz="1200"/>
+              <a:t>GIẢI NGHĨA BA CHỮ TRÊN BẢNG — phòng khi thầy hỏi:</a:t>
+            </a:r>
+          </a:p>
+          <a:p>
+            <a:r>
+              <a:rPr sz="1200"/>
+              <a:t/>
+            </a:r>
+          </a:p>
+          <a:p>
+            <a:r>
+              <a:rPr sz="1200"/>
+              <a:t>'Phần được kiểm' là mảng chức năng, không phải tên file mã nguồn. Em gộp các file kiểm thử theo việc chúng bảo vệ, cho dễ theo dõi.</a:t>
+            </a:r>
+          </a:p>
+          <a:p>
+            <a:r>
+              <a:rPr sz="1200"/>
+              <a:t/>
+            </a:r>
+          </a:p>
+          <a:p>
+            <a:r>
+              <a:rPr sz="1200"/>
+              <a:t>'Số ca' là số ca kiểm thử tự động — mỗi ca dựng một tình huống cụ thể, chạy, rồi so kết quả với điều mong đợi. Chạy bằng một lệnh, hết khoảng mười lăm giây, không cần mạng và không gọi mô hình ngôn ngữ.</a:t>
+            </a:r>
+          </a:p>
+          <a:p>
+            <a:r>
+              <a:rPr sz="1200"/>
+              <a:t/>
+            </a:r>
+          </a:p>
+          <a:p>
+            <a:r>
+              <a:rPr sz="1200"/>
+              <a:t>'Bộ đối chiếu đơn hàng' là phần so hồ sơ ứng viên với từng đơn tuyển dụng. Nó viết bằng quy tắc thuần: không gọi mô hình ngôn ngữ, không đọc đồng hồ hệ thống, không truy vấn cơ sở dữ liệu trong lúc tính. Nhờ ba điều đó mà cùng một hồ sơ luôn cho cùng một kết quả, và kiểm thử được tuyệt đối.</a:t>
+            </a:r>
+          </a:p>
+          <a:p>
+            <a:r>
+              <a:rPr sz="1200"/>
+              <a:t/>
+            </a:r>
+          </a:p>
+          <a:p>
+            <a:r>
+              <a:rPr sz="1200"/>
+              <a:t>VÌ SAO BỘ ĐỐI CHIẾU CHIẾM GẦN MỘT NỬA SỐ CA:</a:t>
+            </a:r>
+          </a:p>
+          <a:p>
+            <a:r>
+              <a:rPr sz="1200"/>
+              <a:t>Vì nó là phần quyết định ai được giới thiệu đơn nào. Sai ở đây là loại oan một ứng viên đủ điều kiện, hoặc giới thiệu một đơn họ không thể trúng — cả hai đều ảnh hưởng tới người thật. Các phần khác sai thì còn sửa được, phần này sai thì hỏng niềm tin vào cả hệ thống.</a:t>
+            </a:r>
+          </a:p>
+          <a:p>
+            <a:r>
+              <a:rPr sz="1200"/>
+              <a:t/>
+            </a:r>
+          </a:p>
+          <a:p>
+            <a:r>
+              <a:rPr sz="1200"/>
+              <a:t>NẾU THẦY HỎI 'KIỂM THỬ NÀY CHỨNG MINH ĐƯỢC GÌ':</a:t>
+            </a:r>
+          </a:p>
+          <a:p>
+            <a:r>
+              <a:rPr sz="1200"/>
+              <a:t>Nó chứng minh quy tắc chạy đúng như thiết kế. Nó KHÔNG chứng minh hệ thống chịu được tải thật, cũng không chứng minh chất lượng câu trả lời của trợ lý — phần đó phụ thuộc kho tài liệu và em đo riêng.</a:t>
+            </a:r>
+          </a:p>
+        </p:txBody>
+      </p:sp>
+      <p:sp>
+        <p:nvSpPr>
+          <p:cNvPr id="4" name="Slide Number Placeholder 3"/>
+          <p:cNvSpPr>
+            <a:spLocks noGrp="1"/>
+          </p:cNvSpPr>
+          <p:nvPr>
+            <p:ph type="sldNum" idx="5" sz="quarter"/>
+          </p:nvPr>
+        </p:nvSpPr>
+        <p:spPr/>
+      </p:sp>
+    </p:spTree>
+  </p:cSld>
+  <p:clrMapOvr>
+    <a:masterClrMapping/>
+  </p:clrMapOvr>
+</p:notes>
+</file>
+
 <file path=ppt/slideLayouts/slideLayout1.xml><?xml version="1.0" encoding="utf-8"?>
 <p:sldLayout xmlns:a="http://schemas.openxmlformats.org/drawingml/2006/main" xmlns:r="http://schemas.openxmlformats.org/officeDocument/2006/relationships" xmlns:p="http://schemas.openxmlformats.org/presentationml/2006/main" type="title" preserve="1">
   <p:cSld name="Title Slide">
@@ -5928,7 +6576,7 @@
                 <a:gridCol w="981184"/>
                 <a:gridCol w="6279578"/>
               </a:tblGrid>
-              <a:tr h="940994">
+              <a:tr h="1176243">
                 <a:tc>
                   <a:txBody>
                     <a:bodyPr/>
@@ -5941,7 +6589,7 @@
                           </a:solidFill>
                           <a:latin typeface="Times New Roman"/>
                         </a:rPr>
-                        <a:t>Nhóm kiểm thử</a:t>
+                        <a:t>Phần được kiểm</a:t>
                       </a:r>
                     </a:p>
                   </a:txBody>
@@ -5985,7 +6633,7 @@
                   <a:tcPr/>
                 </a:tc>
               </a:tr>
-              <a:tr h="940994">
+              <a:tr h="1176243">
                 <a:tc>
                   <a:txBody>
                     <a:bodyPr/>
@@ -5998,7 +6646,7 @@
                           </a:solidFill>
                           <a:latin typeface="Times New Roman"/>
                         </a:rPr>
-                        <a:t>Bộ đối chiếu</a:t>
+                        <a:t>Bộ đối chiếu đơn hàng</a:t>
                       </a:r>
                     </a:p>
                   </a:txBody>
@@ -6035,14 +6683,14 @@
                           </a:solidFill>
                           <a:latin typeface="Times New Roman"/>
                         </a:rPr>
-                        <a:t>Bảy tiêu chí cứng, bốn tiêu chí mềm, tính tất định, thứ tự xếp hạng</a:t>
+                        <a:t>Bảy điều kiện bắt buộc, bốn tiêu chí nguyện vọng, tính tất định</a:t>
                       </a:r>
                     </a:p>
                   </a:txBody>
                   <a:tcPr/>
                 </a:tc>
               </a:tr>
-              <a:tr h="940994">
+              <a:tr h="1176243">
                 <a:tc>
                   <a:txBody>
                     <a:bodyPr/>
@@ -6055,7 +6703,7 @@
                           </a:solidFill>
                           <a:latin typeface="Times New Roman"/>
                         </a:rPr>
-                        <a:t>Đọc CV, đăng ký, hàng đợi</a:t>
+                        <a:t>Hồ sơ ứng viên và bàn giao</a:t>
                       </a:r>
                     </a:p>
                   </a:txBody>
@@ -6074,7 +6722,7 @@
                           </a:solidFill>
                           <a:latin typeface="Times New Roman"/>
                         </a:rPr>
-                        <a:t>101</a:t>
+                        <a:t>138</a:t>
                       </a:r>
                     </a:p>
                   </a:txBody>
@@ -6092,14 +6740,14 @@
                           </a:solidFill>
                           <a:latin typeface="Times New Roman"/>
                         </a:rPr>
-                        <a:t>Bóc tách có căn cứ, chuỗi chốt chặn khi đăng ký, bàn giao hồ sơ</a:t>
+                        <a:t>Đọc CV có căn cứ, đăng ký, hàng đợi, quyền xem hồ sơ</a:t>
                       </a:r>
                     </a:p>
                   </a:txBody>
                   <a:tcPr/>
                 </a:tc>
               </a:tr>
-              <a:tr h="940994">
+              <a:tr h="1176245">
                 <a:tc>
                   <a:txBody>
                     <a:bodyPr/>
@@ -6112,64 +6760,7 @@
                           </a:solidFill>
                           <a:latin typeface="Times New Roman"/>
                         </a:rPr>
-                        <a:t>Hệ khách hàng, mật khẩu</a:t>
-                      </a:r>
-                    </a:p>
-                  </a:txBody>
-                  <a:tcPr/>
-                </a:tc>
-                <a:tc>
-                  <a:txBody>
-                    <a:bodyPr/>
-                    <a:lstStyle/>
-                    <a:p>
-                      <a:pPr algn="ctr"/>
-                      <a:r>
-                        <a:rPr sz="1500" b="0">
-                          <a:solidFill>
-                            <a:srgbClr val="1B1B1B"/>
-                          </a:solidFill>
-                          <a:latin typeface="Times New Roman"/>
-                        </a:rPr>
-                        <a:t>37</a:t>
-                      </a:r>
-                    </a:p>
-                  </a:txBody>
-                  <a:tcPr/>
-                </a:tc>
-                <a:tc>
-                  <a:txBody>
-                    <a:bodyPr/>
-                    <a:lstStyle/>
-                    <a:p>
-                      <a:r>
-                        <a:rPr sz="1500" b="0">
-                          <a:solidFill>
-                            <a:srgbClr val="1B1B1B"/>
-                          </a:solidFill>
-                          <a:latin typeface="Times New Roman"/>
-                        </a:rPr>
-                        <a:t>Hai loại phiên không dùng lẫn, ứng viên chỉ thấy hồ sơ của mình</a:t>
-                      </a:r>
-                    </a:p>
-                  </a:txBody>
-                  <a:tcPr/>
-                </a:tc>
-              </a:tr>
-              <a:tr h="940998">
-                <a:tc>
-                  <a:txBody>
-                    <a:bodyPr/>
-                    <a:lstStyle/>
-                    <a:p>
-                      <a:r>
-                        <a:rPr sz="1500" b="0">
-                          <a:solidFill>
-                            <a:srgbClr val="1B1B1B"/>
-                          </a:solidFill>
-                          <a:latin typeface="Times New Roman"/>
-                        </a:rPr>
-                        <a:t>Hội thoại, truy xuất, nền</a:t>
+                        <a:t>Hội thoại và nền hệ thống</a:t>
                       </a:r>
                     </a:p>
                   </a:txBody>
@@ -6206,7 +6797,7 @@
                           </a:solidFill>
                           <a:latin typeface="Times New Roman"/>
                         </a:rPr>
-                        <a:t>Phân loại ý định, chọn đoạn ngữ cảnh, kiểm chứng câu trả lời</a:t>
+                        <a:t>Phân loại ý định, chọn ngữ cảnh, kiểm chứng câu trả lời</a:t>
                       </a:r>
                     </a:p>
                   </a:txBody>
@@ -6639,4 +7230,324 @@
     </a:ext>
   </a:extLst>
 </a:theme>
+</file>
+
+<file path=ppt/theme/theme2.xml><?xml version="1.0" encoding="utf-8"?>
+<a:theme xmlns:a="http://schemas.openxmlformats.org/drawingml/2006/main" name="Office Theme">
+  <a:themeElements>
+    <a:clrScheme name="Office">
+      <a:dk1>
+        <a:sysClr val="windowText" lastClr="000000"/>
+      </a:dk1>
+      <a:lt1>
+        <a:sysClr val="window" lastClr="FFFFFF"/>
+      </a:lt1>
+      <a:dk2>
+        <a:srgbClr val="1F497D"/>
+      </a:dk2>
+      <a:lt2>
+        <a:srgbClr val="EEECE1"/>
+      </a:lt2>
+      <a:accent1>
+        <a:srgbClr val="4F81BD"/>
+      </a:accent1>
+      <a:accent2>
+        <a:srgbClr val="C0504D"/>
+      </a:accent2>
+      <a:accent3>
+        <a:srgbClr val="9BBB59"/>
+      </a:accent3>
+      <a:accent4>
+        <a:srgbClr val="8064A2"/>
+      </a:accent4>
+      <a:accent5>
+        <a:srgbClr val="4BACC6"/>
+      </a:accent5>
+      <a:accent6>
+        <a:srgbClr val="F79646"/>
+      </a:accent6>
+      <a:hlink>
+        <a:srgbClr val="0000FF"/>
+      </a:hlink>
+      <a:folHlink>
+        <a:srgbClr val="800080"/>
+      </a:folHlink>
+    </a:clrScheme>
+    <a:fontScheme name="Office">
+      <a:majorFont>
+        <a:latin typeface="Calibri"/>
+        <a:ea typeface=""/>
+        <a:cs typeface=""/>
+        <a:font script="Jpan" typeface="ＭＳ Ｐゴシック"/>
+        <a:font script="Hang" typeface="맑은 고딕"/>
+        <a:font script="Hans" typeface="宋体"/>
+        <a:font script="Hant" typeface="新細明體"/>
+        <a:font script="Arab" typeface="Times New Roman"/>
+        <a:font script="Hebr" typeface="Times New Roman"/>
+        <a:font script="Thai" typeface="Angsana New"/>
+        <a:font script="Ethi" typeface="Nyala"/>
+        <a:font script="Beng" typeface="Vrinda"/>
+        <a:font script="Gujr" typeface="Shruti"/>
+        <a:font script="Khmr" typeface="MoolBoran"/>
+        <a:font script="Knda" typeface="Tunga"/>
+        <a:font script="Guru" typeface="Raavi"/>
+        <a:font script="Cans" typeface="Euphemia"/>
+        <a:font script="Cher" typeface="Plantagenet Cherokee"/>
+        <a:font script="Yiii" typeface="Microsoft Yi Baiti"/>
+        <a:font script="Tibt" typeface="Microsoft Himalaya"/>
+        <a:font script="Thaa" typeface="MV Boli"/>
+        <a:font script="Deva" typeface="Mangal"/>
+        <a:font script="Telu" typeface="Gautami"/>
+        <a:font script="Taml" typeface="Latha"/>
+        <a:font script="Syrc" typeface="Estrangelo Edessa"/>
+        <a:font script="Orya" typeface="Kalinga"/>
+        <a:font script="Mlym" typeface="Kartika"/>
+        <a:font script="Laoo" typeface="DokChampa"/>
+        <a:font script="Sinh" typeface="Iskoola Pota"/>
+        <a:font script="Mong" typeface="Mongolian Baiti"/>
+        <a:font script="Viet" typeface="Times New Roman"/>
+        <a:font script="Uigh" typeface="Microsoft Uighur"/>
+        <a:font script="Geor" typeface="Sylfaen"/>
+      </a:majorFont>
+      <a:minorFont>
+        <a:latin typeface="Calibri"/>
+        <a:ea typeface=""/>
+        <a:cs typeface=""/>
+        <a:font script="Jpan" typeface="ＭＳ Ｐゴシック"/>
+        <a:font script="Hang" typeface="맑은 고딕"/>
+        <a:font script="Hans" typeface="宋体"/>
+        <a:font script="Hant" typeface="新細明體"/>
+        <a:font script="Arab" typeface="Arial"/>
+        <a:font script="Hebr" typeface="Arial"/>
+        <a:font script="Thai" typeface="Cordia New"/>
+        <a:font script="Ethi" typeface="Nyala"/>
+        <a:font script="Beng" typeface="Vrinda"/>
+        <a:font script="Gujr" typeface="Shruti"/>
+        <a:font script="Khmr" typeface="DaunPenh"/>
+        <a:font script="Knda" typeface="Tunga"/>
+        <a:font script="Guru" typeface="Raavi"/>
+        <a:font script="Cans" typeface="Euphemia"/>
+        <a:font script="Cher" typeface="Plantagenet Cherokee"/>
+        <a:font script="Yiii" typeface="Microsoft Yi Baiti"/>
+        <a:font script="Tibt" typeface="Microsoft Himalaya"/>
+        <a:font script="Thaa" typeface="MV Boli"/>
+        <a:font script="Deva" typeface="Mangal"/>
+        <a:font script="Telu" typeface="Gautami"/>
+        <a:font script="Taml" typeface="Latha"/>
+        <a:font script="Syrc" typeface="Estrangelo Edessa"/>
+        <a:font script="Orya" typeface="Kalinga"/>
+        <a:font script="Mlym" typeface="Kartika"/>
+        <a:font script="Laoo" typeface="DokChampa"/>
+        <a:font script="Sinh" typeface="Iskoola Pota"/>
+        <a:font script="Mong" typeface="Mongolian Baiti"/>
+        <a:font script="Viet" typeface="Arial"/>
+        <a:font script="Uigh" typeface="Microsoft Uighur"/>
+        <a:font script="Geor" typeface="Sylfaen"/>
+      </a:minorFont>
+    </a:fontScheme>
+    <a:fmtScheme name="Office">
+      <a:fillStyleLst>
+        <a:solidFill>
+          <a:schemeClr val="phClr"/>
+        </a:solidFill>
+        <a:gradFill rotWithShape="1">
+          <a:gsLst>
+            <a:gs pos="0">
+              <a:schemeClr val="phClr">
+                <a:tint val="50000"/>
+                <a:satMod val="300000"/>
+              </a:schemeClr>
+            </a:gs>
+            <a:gs pos="35000">
+              <a:schemeClr val="phClr">
+                <a:tint val="37000"/>
+                <a:satMod val="300000"/>
+              </a:schemeClr>
+            </a:gs>
+            <a:gs pos="100000">
+              <a:schemeClr val="phClr">
+                <a:tint val="15000"/>
+                <a:satMod val="350000"/>
+              </a:schemeClr>
+            </a:gs>
+          </a:gsLst>
+          <a:lin ang="16200000" scaled="1"/>
+        </a:gradFill>
+        <a:gradFill rotWithShape="1">
+          <a:gsLst>
+            <a:gs pos="0">
+              <a:schemeClr val="phClr">
+                <a:tint val="100000"/>
+                <a:shade val="100000"/>
+                <a:satMod val="130000"/>
+              </a:schemeClr>
+            </a:gs>
+            <a:gs pos="100000">
+              <a:schemeClr val="phClr">
+                <a:tint val="50000"/>
+                <a:shade val="100000"/>
+                <a:satMod val="350000"/>
+              </a:schemeClr>
+            </a:gs>
+          </a:gsLst>
+          <a:lin ang="16200000" scaled="0"/>
+        </a:gradFill>
+      </a:fillStyleLst>
+      <a:lnStyleLst>
+        <a:ln w="9525" cap="flat" cmpd="sng" algn="ctr">
+          <a:solidFill>
+            <a:schemeClr val="phClr">
+              <a:shade val="95000"/>
+              <a:satMod val="105000"/>
+            </a:schemeClr>
+          </a:solidFill>
+          <a:prstDash val="solid"/>
+        </a:ln>
+        <a:ln w="25400" cap="flat" cmpd="sng" algn="ctr">
+          <a:solidFill>
+            <a:schemeClr val="phClr"/>
+          </a:solidFill>
+          <a:prstDash val="solid"/>
+        </a:ln>
+        <a:ln w="38100" cap="flat" cmpd="sng" algn="ctr">
+          <a:solidFill>
+            <a:schemeClr val="phClr"/>
+          </a:solidFill>
+          <a:prstDash val="solid"/>
+        </a:ln>
+      </a:lnStyleLst>
+      <a:effectStyleLst>
+        <a:effectStyle>
+          <a:effectLst>
+            <a:outerShdw blurRad="40000" dist="20000" dir="5400000" rotWithShape="0">
+              <a:srgbClr val="000000">
+                <a:alpha val="38000"/>
+              </a:srgbClr>
+            </a:outerShdw>
+          </a:effectLst>
+        </a:effectStyle>
+        <a:effectStyle>
+          <a:effectLst>
+            <a:outerShdw blurRad="40000" dist="23000" dir="5400000" rotWithShape="0">
+              <a:srgbClr val="000000">
+                <a:alpha val="35000"/>
+              </a:srgbClr>
+            </a:outerShdw>
+          </a:effectLst>
+        </a:effectStyle>
+        <a:effectStyle>
+          <a:effectLst>
+            <a:outerShdw blurRad="40000" dist="23000" dir="5400000" rotWithShape="0">
+              <a:srgbClr val="000000">
+                <a:alpha val="35000"/>
+              </a:srgbClr>
+            </a:outerShdw>
+          </a:effectLst>
+          <a:scene3d>
+            <a:camera prst="orthographicFront">
+              <a:rot lat="0" lon="0" rev="0"/>
+            </a:camera>
+            <a:lightRig rig="threePt" dir="t">
+              <a:rot lat="0" lon="0" rev="1200000"/>
+            </a:lightRig>
+          </a:scene3d>
+          <a:sp3d>
+            <a:bevelT w="63500" h="25400"/>
+          </a:sp3d>
+        </a:effectStyle>
+      </a:effectStyleLst>
+      <a:bgFillStyleLst>
+        <a:solidFill>
+          <a:schemeClr val="phClr"/>
+        </a:solidFill>
+        <a:gradFill rotWithShape="1">
+          <a:gsLst>
+            <a:gs pos="0">
+              <a:schemeClr val="phClr">
+                <a:tint val="40000"/>
+                <a:satMod val="350000"/>
+              </a:schemeClr>
+            </a:gs>
+            <a:gs pos="40000">
+              <a:schemeClr val="phClr">
+                <a:tint val="45000"/>
+                <a:shade val="99000"/>
+                <a:satMod val="350000"/>
+              </a:schemeClr>
+            </a:gs>
+            <a:gs pos="100000">
+              <a:schemeClr val="phClr">
+                <a:shade val="20000"/>
+                <a:satMod val="255000"/>
+              </a:schemeClr>
+            </a:gs>
+          </a:gsLst>
+          <a:path path="circle">
+            <a:fillToRect l="50000" t="-80000" r="50000" b="180000"/>
+          </a:path>
+        </a:gradFill>
+        <a:gradFill rotWithShape="1">
+          <a:gsLst>
+            <a:gs pos="0">
+              <a:schemeClr val="phClr">
+                <a:tint val="80000"/>
+                <a:satMod val="300000"/>
+              </a:schemeClr>
+            </a:gs>
+            <a:gs pos="100000">
+              <a:schemeClr val="phClr">
+                <a:shade val="30000"/>
+                <a:satMod val="200000"/>
+              </a:schemeClr>
+            </a:gs>
+          </a:gsLst>
+          <a:path path="circle">
+            <a:fillToRect l="50000" t="50000" r="50000" b="50000"/>
+          </a:path>
+        </a:gradFill>
+      </a:bgFillStyleLst>
+    </a:fmtScheme>
+  </a:themeElements>
+  <a:objectDefaults>
+    <a:spDef>
+      <a:spPr/>
+      <a:bodyPr/>
+      <a:lstStyle/>
+      <a:style>
+        <a:lnRef idx="1">
+          <a:schemeClr val="accent1"/>
+        </a:lnRef>
+        <a:fillRef idx="3">
+          <a:schemeClr val="accent1"/>
+        </a:fillRef>
+        <a:effectRef idx="2">
+          <a:schemeClr val="accent1"/>
+        </a:effectRef>
+        <a:fontRef idx="minor">
+          <a:schemeClr val="lt1"/>
+        </a:fontRef>
+      </a:style>
+    </a:spDef>
+    <a:lnDef>
+      <a:spPr/>
+      <a:bodyPr/>
+      <a:lstStyle/>
+      <a:style>
+        <a:lnRef idx="2">
+          <a:schemeClr val="accent1"/>
+        </a:lnRef>
+        <a:fillRef idx="0">
+          <a:schemeClr val="accent1"/>
+        </a:fillRef>
+        <a:effectRef idx="1">
+          <a:schemeClr val="accent1"/>
+        </a:effectRef>
+        <a:fontRef idx="minor">
+          <a:schemeClr val="tx1"/>
+        </a:fontRef>
+      </a:style>
+    </a:lnDef>
+  </a:objectDefaults>
+  <a:extraClrSchemeLst/>
+</a:theme>
 </file>
--- a/tailieu/BaoCao_TienDo_DATN_HoangMinhDuc_2200583.pptx
+++ b/tailieu/BaoCao_TienDo_DATN_HoangMinhDuc_2200583.pptx
@@ -1039,7 +1039,7 @@
           <a:p>
             <a:r>
               <a:rPr sz="1200"/>
-              <a:t>GIẢI NGHĨA BA CHỮ TRÊN BẢNG — phòng khi thầy hỏi:</a:t>
+              <a:t>CÁCH NÓI SLIDE NÀY — đừng đọc bảng, kể bốn câu chuyện:</a:t>
             </a:r>
           </a:p>
           <a:p>
@@ -1051,7 +1051,7 @@
           <a:p>
             <a:r>
               <a:rPr sz="1200"/>
-              <a:t>'Phần được kiểm' là mảng chức năng, không phải tên file mã nguồn. Em gộp các file kiểm thử theo việc chúng bảo vệ, cho dễ theo dõi.</a:t>
+              <a:t>Toàn bộ có 617 ca tự động, chạy bằng một lệnh, hết khoảng mười lăm giây, không cần mạng và không gọi mô hình ngôn ngữ. Nhưng con số đó không nói được hệ thống chặn cái gì, nên em chọn ra bốn ca tiêu biểu.</a:t>
             </a:r>
           </a:p>
           <a:p>
@@ -1063,7 +1063,7 @@
           <a:p>
             <a:r>
               <a:rPr sz="1200"/>
-              <a:t>'Số ca' là số ca kiểm thử tự động — mỗi ca dựng một tình huống cụ thể, chạy, rồi so kết quả với điều mong đợi. Chạy bằng một lệnh, hết khoảng mười lăm giây, không cần mạng và không gọi mô hình ngôn ngữ.</a:t>
+              <a:t>CA 1 — TÍNH TẤT ĐỊNH. Chạy đối chiếu hai lần phải ra kết quả giống hệt nhau từng byte, và xáo trộn thứ tự đơn đầu vào vẫn ra đúng thứ tự đó. Đây là điều kiện để giải trình được: nếu cùng một hồ sơ mà hai lần cho hai kết quả, thì không thể nói với ứng viên vì sao họ bị loại.</a:t>
             </a:r>
           </a:p>
           <a:p>
@@ -1075,7 +1075,7 @@
           <a:p>
             <a:r>
               <a:rPr sz="1200"/>
-              <a:t>'Bộ đối chiếu đơn hàng' là phần so hồ sơ ứng viên với từng đơn tuyển dụng. Nó viết bằng quy tắc thuần: không gọi mô hình ngôn ngữ, không đọc đồng hồ hệ thống, không truy vấn cơ sở dữ liệu trong lúc tính. Nhờ ba điều đó mà cùng một hồ sơ luôn cho cùng một kết quả, và kiểm thử được tuyệt đối.</a:t>
+              <a:t>CA 2 — ĐIỀU CHƯA BIẾT KHÔNG LOẠI AI. Một hồ sơ mới khai mỗi họ tên vẫn phải nhận được đơn phù hợp. Người chưa khai năm sinh không phải là người quá tuổi — đó là hai chuyện khác nhau. Nếu loại theo cái chưa biết thì hồ sơ điền một nửa sẽ ra không đơn nào, và giấu mất đơn thật sự hợp.</a:t>
             </a:r>
           </a:p>
           <a:p>
@@ -1087,13 +1087,7 @@
           <a:p>
             <a:r>
               <a:rPr sz="1200"/>
-              <a:t>VÌ SAO BỘ ĐỐI CHIẾU CHIẾM GẦN MỘT NỬA SỐ CA:</a:t>
-            </a:r>
-          </a:p>
-          <a:p>
-            <a:r>
-              <a:rPr sz="1200"/>
-              <a:t>Vì nó là phần quyết định ai được giới thiệu đơn nào. Sai ở đây là loại oan một ứng viên đủ điều kiện, hoặc giới thiệu một đơn họ không thể trúng — cả hai đều ảnh hưởng tới người thật. Các phần khác sai thì còn sửa được, phần này sai thì hỏng niềm tin vào cả hệ thống.</a:t>
+              <a:t>CA 3 — RANH GIỚI HAI HỆ THỐNG. Phiên đăng nhập của ứng viên đem sang cửa quản trị phải bị từ chối, và ngược lại. Ràng buộc này nằm trong nội dung đã ký của phiếu đăng nhập, không phải ở giao diện.</a:t>
             </a:r>
           </a:p>
           <a:p>
@@ -1105,13 +1099,31 @@
           <a:p>
             <a:r>
               <a:rPr sz="1200"/>
-              <a:t>NẾU THẦY HỎI 'KIỂM THỬ NÀY CHỨNG MINH ĐƯỢC GÌ':</a:t>
+              <a:t>CA 4 — CÁCH LY DỮ LIỆU. Đổi mã hồ sơ trên thanh địa chỉ phải trả 404. Mọi truy vấn đều khóa theo mã khách hàng lấy từ phiên đăng nhập, không lấy từ tham số người gọi gửi lên.</a:t>
             </a:r>
           </a:p>
           <a:p>
             <a:r>
               <a:rPr sz="1200"/>
-              <a:t>Nó chứng minh quy tắc chạy đúng như thiết kế. Nó KHÔNG chứng minh hệ thống chịu được tải thật, cũng không chứng minh chất lượng câu trả lời của trợ lý — phần đó phụ thuộc kho tài liệu và em đo riêng.</a:t>
+              <a:t/>
+            </a:r>
+          </a:p>
+          <a:p>
+            <a:r>
+              <a:rPr sz="1200"/>
+              <a:t>ĐIỂM CHUNG CỦA BỐN CA: mỗi cái đều trả lời câu 'nếu hỏng thì ai chịu thiệt'. Đó là lý do em chọn chúng thay vì bốn ca bất kỳ.</a:t>
+            </a:r>
+          </a:p>
+          <a:p>
+            <a:r>
+              <a:rPr sz="1200"/>
+              <a:t/>
+            </a:r>
+          </a:p>
+          <a:p>
+            <a:r>
+              <a:rPr sz="1200"/>
+              <a:t>NẾU THẦY HỎI KIỂM THỬ NÀY CHỨNG MINH ĐƯỢC GÌ: nó chứng minh quy tắc chạy đúng như thiết kế. Nó KHÔNG chứng minh hệ thống chịu được tải thật, cũng không chứng minh chất lượng câu trả lời của trợ lý — phần đó phụ thuộc kho tài liệu và em đo riêng.</a:t>
             </a:r>
           </a:p>
         </p:txBody>
@@ -6538,13 +6550,13 @@
               </a:spcAft>
             </a:pPr>
             <a:r>
-              <a:rPr sz="2000" b="1">
+              <a:rPr sz="1800" b="1">
                 <a:solidFill>
                   <a:srgbClr val="B32D2D"/>
                 </a:solidFill>
                 <a:latin typeface="Times New Roman"/>
               </a:rPr>
-              <a:t>617 ca kiểm thử, tất cả đạt</a:t>
+              <a:t>617 ca tự động, tất cả đạt — bốn ca tiêu biểu:</a:t>
             </a:r>
             <a:endParaRPr lang="en-US" sz="2400" b="1" dirty="0">
               <a:latin typeface="Times New Roman" panose="02020603050405020304" pitchFamily="18" charset="0"/>
@@ -6563,7 +6575,7 @@
         </p:nvGraphicFramePr>
         <p:xfrm>
           <a:off x="1333515" y="1286300"/>
-          <a:ext cx="9811840" cy="4704974"/>
+          <a:ext cx="9811842" cy="4704974"/>
         </p:xfrm>
         <a:graphic>
           <a:graphicData uri="http://schemas.openxmlformats.org/drawingml/2006/table">
@@ -6572,43 +6584,23 @@
                 <a:tableStyleId>{5C22544A-7EE6-4342-B048-85BDC9FD1C3A}</a:tableStyleId>
               </a:tblPr>
               <a:tblGrid>
-                <a:gridCol w="2551078"/>
-                <a:gridCol w="981184"/>
-                <a:gridCol w="6279578"/>
+                <a:gridCol w="4905921"/>
+                <a:gridCol w="4905921"/>
               </a:tblGrid>
-              <a:tr h="1176243">
+              <a:tr h="940994">
                 <a:tc>
                   <a:txBody>
                     <a:bodyPr/>
                     <a:lstStyle/>
                     <a:p>
                       <a:r>
-                        <a:rPr sz="1600" b="1">
+                        <a:rPr sz="1500" b="1">
                           <a:solidFill>
                             <a:srgbClr val="1B1B1B"/>
                           </a:solidFill>
                           <a:latin typeface="Times New Roman"/>
                         </a:rPr>
-                        <a:t>Phần được kiểm</a:t>
-                      </a:r>
-                    </a:p>
-                  </a:txBody>
-                  <a:tcPr/>
-                </a:tc>
-                <a:tc>
-                  <a:txBody>
-                    <a:bodyPr/>
-                    <a:lstStyle/>
-                    <a:p>
-                      <a:pPr algn="ctr"/>
-                      <a:r>
-                        <a:rPr sz="1600" b="1">
-                          <a:solidFill>
-                            <a:srgbClr val="1B1B1B"/>
-                          </a:solidFill>
-                          <a:latin typeface="Times New Roman"/>
-                        </a:rPr>
-                        <a:t>Số ca</a:t>
+                        <a:t>Ca kiểm thử</a:t>
                       </a:r>
                     </a:p>
                   </a:txBody>
@@ -6620,52 +6612,33 @@
                     <a:lstStyle/>
                     <a:p>
                       <a:r>
-                        <a:rPr sz="1600" b="1">
+                        <a:rPr sz="1500" b="1">
                           <a:solidFill>
                             <a:srgbClr val="1B1B1B"/>
                           </a:solidFill>
                           <a:latin typeface="Times New Roman"/>
                         </a:rPr>
-                        <a:t>Kiểm điều gì</a:t>
+                        <a:t>Nếu hỏng thì sao</a:t>
                       </a:r>
                     </a:p>
                   </a:txBody>
                   <a:tcPr/>
                 </a:tc>
               </a:tr>
-              <a:tr h="1176243">
+              <a:tr h="940994">
                 <a:tc>
                   <a:txBody>
                     <a:bodyPr/>
                     <a:lstStyle/>
                     <a:p>
                       <a:r>
-                        <a:rPr sz="1500" b="0">
+                        <a:rPr sz="1300" b="0">
                           <a:solidFill>
                             <a:srgbClr val="1B1B1B"/>
                           </a:solidFill>
                           <a:latin typeface="Times New Roman"/>
                         </a:rPr>
-                        <a:t>Bộ đối chiếu đơn hàng</a:t>
-                      </a:r>
-                    </a:p>
-                  </a:txBody>
-                  <a:tcPr/>
-                </a:tc>
-                <a:tc>
-                  <a:txBody>
-                    <a:bodyPr/>
-                    <a:lstStyle/>
-                    <a:p>
-                      <a:pPr algn="ctr"/>
-                      <a:r>
-                        <a:rPr sz="1500" b="0">
-                          <a:solidFill>
-                            <a:srgbClr val="1B1B1B"/>
-                          </a:solidFill>
-                          <a:latin typeface="Times New Roman"/>
-                        </a:rPr>
-                        <a:t>285</a:t>
+                        <a:t>Chạy đối chiếu hai lần cho kết quả giống hệt từng byte, kể cả khi xáo trộn thứ tự đơn đầu vào</a:t>
                       </a:r>
                     </a:p>
                   </a:txBody>
@@ -6677,52 +6650,33 @@
                     <a:lstStyle/>
                     <a:p>
                       <a:r>
-                        <a:rPr sz="1500" b="0">
+                        <a:rPr sz="1300" b="0">
                           <a:solidFill>
-                            <a:srgbClr val="1B1B1B"/>
+                            <a:srgbClr val="555555"/>
                           </a:solidFill>
                           <a:latin typeface="Times New Roman"/>
                         </a:rPr>
-                        <a:t>Bảy điều kiện bắt buộc, bốn tiêu chí nguyện vọng, tính tất định</a:t>
+                        <a:t>Cùng một hồ sơ ra hai kết quả khác nhau — không giải trình được với ứng viên lẫn doanh nghiệp</a:t>
                       </a:r>
                     </a:p>
                   </a:txBody>
                   <a:tcPr/>
                 </a:tc>
               </a:tr>
-              <a:tr h="1176243">
+              <a:tr h="940994">
                 <a:tc>
                   <a:txBody>
                     <a:bodyPr/>
                     <a:lstStyle/>
                     <a:p>
                       <a:r>
-                        <a:rPr sz="1500" b="0">
+                        <a:rPr sz="1300" b="0">
                           <a:solidFill>
                             <a:srgbClr val="1B1B1B"/>
                           </a:solidFill>
                           <a:latin typeface="Times New Roman"/>
                         </a:rPr>
-                        <a:t>Hồ sơ ứng viên và bàn giao</a:t>
-                      </a:r>
-                    </a:p>
-                  </a:txBody>
-                  <a:tcPr/>
-                </a:tc>
-                <a:tc>
-                  <a:txBody>
-                    <a:bodyPr/>
-                    <a:lstStyle/>
-                    <a:p>
-                      <a:pPr algn="ctr"/>
-                      <a:r>
-                        <a:rPr sz="1500" b="0">
-                          <a:solidFill>
-                            <a:srgbClr val="1B1B1B"/>
-                          </a:solidFill>
-                          <a:latin typeface="Times New Roman"/>
-                        </a:rPr>
-                        <a:t>138</a:t>
+                        <a:t>Hồ sơ mới khai mỗi họ tên vẫn nhận được đơn phù hợp</a:t>
                       </a:r>
                     </a:p>
                   </a:txBody>
@@ -6734,52 +6688,33 @@
                     <a:lstStyle/>
                     <a:p>
                       <a:r>
-                        <a:rPr sz="1500" b="0">
+                        <a:rPr sz="1300" b="0">
                           <a:solidFill>
-                            <a:srgbClr val="1B1B1B"/>
+                            <a:srgbClr val="555555"/>
                           </a:solidFill>
                           <a:latin typeface="Times New Roman"/>
                         </a:rPr>
-                        <a:t>Đọc CV có căn cứ, đăng ký, hàng đợi, quyền xem hồ sơ</a:t>
+                        <a:t>Người chưa kịp khai hết bị coi là không đủ điều kiện, mất đơn đáng lẽ trúng</a:t>
                       </a:r>
                     </a:p>
                   </a:txBody>
                   <a:tcPr/>
                 </a:tc>
               </a:tr>
-              <a:tr h="1176245">
+              <a:tr h="940994">
                 <a:tc>
                   <a:txBody>
                     <a:bodyPr/>
                     <a:lstStyle/>
                     <a:p>
                       <a:r>
-                        <a:rPr sz="1500" b="0">
+                        <a:rPr sz="1300" b="0">
                           <a:solidFill>
                             <a:srgbClr val="1B1B1B"/>
                           </a:solidFill>
                           <a:latin typeface="Times New Roman"/>
                         </a:rPr>
-                        <a:t>Hội thoại và nền hệ thống</a:t>
-                      </a:r>
-                    </a:p>
-                  </a:txBody>
-                  <a:tcPr/>
-                </a:tc>
-                <a:tc>
-                  <a:txBody>
-                    <a:bodyPr/>
-                    <a:lstStyle/>
-                    <a:p>
-                      <a:pPr algn="ctr"/>
-                      <a:r>
-                        <a:rPr sz="1500" b="0">
-                          <a:solidFill>
-                            <a:srgbClr val="1B1B1B"/>
-                          </a:solidFill>
-                          <a:latin typeface="Times New Roman"/>
-                        </a:rPr>
-                        <a:t>194</a:t>
+                        <a:t>Phiên đăng nhập của ứng viên bị từ chối ở cửa quản trị</a:t>
                       </a:r>
                     </a:p>
                   </a:txBody>
@@ -6791,13 +6726,51 @@
                     <a:lstStyle/>
                     <a:p>
                       <a:r>
-                        <a:rPr sz="1500" b="0">
+                        <a:rPr sz="1300" b="0">
+                          <a:solidFill>
+                            <a:srgbClr val="555555"/>
+                          </a:solidFill>
+                          <a:latin typeface="Times New Roman"/>
+                        </a:rPr>
+                        <a:t>Người ngoài mở được màn hình nội bộ và dữ liệu của ứng viên khác</a:t>
+                      </a:r>
+                    </a:p>
+                  </a:txBody>
+                  <a:tcPr/>
+                </a:tc>
+              </a:tr>
+              <a:tr h="940998">
+                <a:tc>
+                  <a:txBody>
+                    <a:bodyPr/>
+                    <a:lstStyle/>
+                    <a:p>
+                      <a:r>
+                        <a:rPr sz="1300" b="0">
                           <a:solidFill>
                             <a:srgbClr val="1B1B1B"/>
                           </a:solidFill>
                           <a:latin typeface="Times New Roman"/>
                         </a:rPr>
-                        <a:t>Phân loại ý định, chọn ngữ cảnh, kiểm chứng câu trả lời</a:t>
+                        <a:t>Đổi mã hồ sơ trên thanh địa chỉ trả về 404</a:t>
+                      </a:r>
+                    </a:p>
+                  </a:txBody>
+                  <a:tcPr/>
+                </a:tc>
+                <a:tc>
+                  <a:txBody>
+                    <a:bodyPr/>
+                    <a:lstStyle/>
+                    <a:p>
+                      <a:r>
+                        <a:rPr sz="1300" b="0">
+                          <a:solidFill>
+                            <a:srgbClr val="555555"/>
+                          </a:solidFill>
+                          <a:latin typeface="Times New Roman"/>
+                        </a:rPr>
+                        <a:t>Một ứng viên đọc được hồ sơ của người khác chỉ bằng cách đoán mã</a:t>
                       </a:r>
                     </a:p>
                   </a:txBody>

--- a/tailieu/BaoCao_TienDo_DATN_HoangMinhDuc_2200583.pptx
+++ b/tailieu/BaoCao_TienDo_DATN_HoangMinhDuc_2200583.pptx
@@ -6556,7 +6556,7 @@
                 </a:solidFill>
                 <a:latin typeface="Times New Roman"/>
               </a:rPr>
-              <a:t>617 ca tự động, tất cả đạt — bốn ca tiêu biểu:</a:t>
+              <a:t>Bốn ca tiêu biểu — tất cả đạt</a:t>
             </a:r>
             <a:endParaRPr lang="en-US" sz="2400" b="1" dirty="0">
               <a:latin typeface="Times New Roman" panose="02020603050405020304" pitchFamily="18" charset="0"/>
@@ -6575,7 +6575,7 @@
         </p:nvGraphicFramePr>
         <p:xfrm>
           <a:off x="1333515" y="1286300"/>
-          <a:ext cx="9811842" cy="4704974"/>
+          <a:ext cx="9811840" cy="4704974"/>
         </p:xfrm>
         <a:graphic>
           <a:graphicData uri="http://schemas.openxmlformats.org/drawingml/2006/table">
@@ -6584,8 +6584,9 @@
                 <a:tableStyleId>{5C22544A-7EE6-4342-B048-85BDC9FD1C3A}</a:tableStyleId>
               </a:tblPr>
               <a:tblGrid>
-                <a:gridCol w="4905921"/>
-                <a:gridCol w="4905921"/>
+                <a:gridCol w="1668013"/>
+                <a:gridCol w="3728499"/>
+                <a:gridCol w="4415328"/>
               </a:tblGrid>
               <a:tr h="940994">
                 <a:tc>
@@ -6600,7 +6601,7 @@
                           </a:solidFill>
                           <a:latin typeface="Times New Roman"/>
                         </a:rPr>
-                        <a:t>Ca kiểm thử</a:t>
+                        <a:t>Nhóm kiểm thử</a:t>
                       </a:r>
                     </a:p>
                   </a:txBody>
@@ -6618,7 +6619,25 @@
                           </a:solidFill>
                           <a:latin typeface="Times New Roman"/>
                         </a:rPr>
-                        <a:t>Nếu hỏng thì sao</a:t>
+                        <a:t>Ca tiêu biểu</a:t>
+                      </a:r>
+                    </a:p>
+                  </a:txBody>
+                  <a:tcPr/>
+                </a:tc>
+                <a:tc>
+                  <a:txBody>
+                    <a:bodyPr/>
+                    <a:lstStyle/>
+                    <a:p>
+                      <a:r>
+                        <a:rPr sz="1500" b="1">
+                          <a:solidFill>
+                            <a:srgbClr val="1B1B1B"/>
+                          </a:solidFill>
+                          <a:latin typeface="Times New Roman"/>
+                        </a:rPr>
+                        <a:t>Điều được bảo vệ</a:t>
                       </a:r>
                     </a:p>
                   </a:txBody>
@@ -6638,7 +6657,7 @@
                           </a:solidFill>
                           <a:latin typeface="Times New Roman"/>
                         </a:rPr>
-                        <a:t>Chạy đối chiếu hai lần cho kết quả giống hệt từng byte, kể cả khi xáo trộn thứ tự đơn đầu vào</a:t>
+                        <a:t>Bộ đối chiếu</a:t>
                       </a:r>
                     </a:p>
                   </a:txBody>
@@ -6656,7 +6675,25 @@
                           </a:solidFill>
                           <a:latin typeface="Times New Roman"/>
                         </a:rPr>
-                        <a:t>Cùng một hồ sơ ra hai kết quả khác nhau — không giải trình được với ứng viên lẫn doanh nghiệp</a:t>
+                        <a:t>Chạy hai lần, xáo trộn thứ tự đơn đầu vào</a:t>
+                      </a:r>
+                    </a:p>
+                  </a:txBody>
+                  <a:tcPr/>
+                </a:tc>
+                <a:tc>
+                  <a:txBody>
+                    <a:bodyPr/>
+                    <a:lstStyle/>
+                    <a:p>
+                      <a:r>
+                        <a:rPr sz="1300" b="0">
+                          <a:solidFill>
+                            <a:srgbClr val="555555"/>
+                          </a:solidFill>
+                          <a:latin typeface="Times New Roman"/>
+                        </a:rPr>
+                        <a:t>Kết quả giống hệt từng byte — giải trình được</a:t>
                       </a:r>
                     </a:p>
                   </a:txBody>
@@ -6676,7 +6713,7 @@
                           </a:solidFill>
                           <a:latin typeface="Times New Roman"/>
                         </a:rPr>
-                        <a:t>Hồ sơ mới khai mỗi họ tên vẫn nhận được đơn phù hợp</a:t>
+                        <a:t>Bộ đối chiếu</a:t>
                       </a:r>
                     </a:p>
                   </a:txBody>
@@ -6694,7 +6731,25 @@
                           </a:solidFill>
                           <a:latin typeface="Times New Roman"/>
                         </a:rPr>
-                        <a:t>Người chưa kịp khai hết bị coi là không đủ điều kiện, mất đơn đáng lẽ trúng</a:t>
+                        <a:t>Hồ sơ mới khai mỗi họ tên</a:t>
+                      </a:r>
+                    </a:p>
+                  </a:txBody>
+                  <a:tcPr/>
+                </a:tc>
+                <a:tc>
+                  <a:txBody>
+                    <a:bodyPr/>
+                    <a:lstStyle/>
+                    <a:p>
+                      <a:r>
+                        <a:rPr sz="1300" b="0">
+                          <a:solidFill>
+                            <a:srgbClr val="555555"/>
+                          </a:solidFill>
+                          <a:latin typeface="Times New Roman"/>
+                        </a:rPr>
+                        <a:t>Vẫn nhận được đơn phù hợp — điều chưa biết không loại ai</a:t>
                       </a:r>
                     </a:p>
                   </a:txBody>
@@ -6714,7 +6769,7 @@
                           </a:solidFill>
                           <a:latin typeface="Times New Roman"/>
                         </a:rPr>
-                        <a:t>Phiên đăng nhập của ứng viên bị từ chối ở cửa quản trị</a:t>
+                        <a:t>Hệ khách hàng</a:t>
                       </a:r>
                     </a:p>
                   </a:txBody>
@@ -6732,7 +6787,25 @@
                           </a:solidFill>
                           <a:latin typeface="Times New Roman"/>
                         </a:rPr>
-                        <a:t>Người ngoài mở được màn hình nội bộ và dữ liệu của ứng viên khác</a:t>
+                        <a:t>Phiên của ứng viên đem sang cửa quản trị</a:t>
+                      </a:r>
+                    </a:p>
+                  </a:txBody>
+                  <a:tcPr/>
+                </a:tc>
+                <a:tc>
+                  <a:txBody>
+                    <a:bodyPr/>
+                    <a:lstStyle/>
+                    <a:p>
+                      <a:r>
+                        <a:rPr sz="1300" b="0">
+                          <a:solidFill>
+                            <a:srgbClr val="555555"/>
+                          </a:solidFill>
+                          <a:latin typeface="Times New Roman"/>
+                        </a:rPr>
+                        <a:t>Bị từ chối — hai hệ thống không dùng lẫn phiên</a:t>
                       </a:r>
                     </a:p>
                   </a:txBody>
@@ -6752,7 +6825,7 @@
                           </a:solidFill>
                           <a:latin typeface="Times New Roman"/>
                         </a:rPr>
-                        <a:t>Đổi mã hồ sơ trên thanh địa chỉ trả về 404</a:t>
+                        <a:t>Hệ khách hàng</a:t>
                       </a:r>
                     </a:p>
                   </a:txBody>
@@ -6770,7 +6843,25 @@
                           </a:solidFill>
                           <a:latin typeface="Times New Roman"/>
                         </a:rPr>
-                        <a:t>Một ứng viên đọc được hồ sơ của người khác chỉ bằng cách đoán mã</a:t>
+                        <a:t>Đổi mã hồ sơ trên thanh địa chỉ</a:t>
+                      </a:r>
+                    </a:p>
+                  </a:txBody>
+                  <a:tcPr/>
+                </a:tc>
+                <a:tc>
+                  <a:txBody>
+                    <a:bodyPr/>
+                    <a:lstStyle/>
+                    <a:p>
+                      <a:r>
+                        <a:rPr sz="1300" b="0">
+                          <a:solidFill>
+                            <a:srgbClr val="555555"/>
+                          </a:solidFill>
+                          <a:latin typeface="Times New Roman"/>
+                        </a:rPr>
+                        <a:t>Trả về 404 — không đọc được hồ sơ người khác</a:t>
                       </a:r>
                     </a:p>
                   </a:txBody>

--- a/tailieu/BaoCao_TienDo_DATN_HoangMinhDuc_2200583.pptx
+++ b/tailieu/BaoCao_TienDo_DATN_HoangMinhDuc_2200583.pptx
@@ -1039,7 +1039,7 @@
           <a:p>
             <a:r>
               <a:rPr sz="1200"/>
-              <a:t>CÁCH NÓI SLIDE NÀY — đừng đọc bảng, kể bốn câu chuyện:</a:t>
+              <a:t>Toàn bộ có 617 ca tự động, chạy bằng một lệnh, hết khoảng mười lăm giây. Em chọn ra bốn ca tiêu biểu vì con số tổng không nói được hệ thống chặn cái gì.</a:t>
             </a:r>
           </a:p>
           <a:p>
@@ -1051,7 +1051,7 @@
           <a:p>
             <a:r>
               <a:rPr sz="1200"/>
-              <a:t>Toàn bộ có 617 ca tự động, chạy bằng một lệnh, hết khoảng mười lăm giây, không cần mạng và không gọi mô hình ngôn ngữ. Nhưng con số đó không nói được hệ thống chặn cái gì, nên em chọn ra bốn ca tiêu biểu.</a:t>
+              <a:t>=== CA 1 — CHẠY HAI LẦN VÀ ĐẢO THỨ TỰ ===</a:t>
             </a:r>
           </a:p>
           <a:p>
@@ -1063,7 +1063,7 @@
           <a:p>
             <a:r>
               <a:rPr sz="1200"/>
-              <a:t>CA 1 — TÍNH TẤT ĐỊNH. Chạy đối chiếu hai lần phải ra kết quả giống hệt nhau từng byte, và xáo trộn thứ tự đơn đầu vào vẫn ra đúng thứ tự đó. Đây là điều kiện để giải trình được: nếu cùng một hồ sơ mà hai lần cho hai kết quả, thì không thể nói với ứng viên vì sao họ bị loại.</a:t>
+              <a:t>'Chạy' ở đây là gọi bộ đối chiếu: đưa vào một hồ sơ ứng viên và một danh sách đơn tuyển dụng, nhận ra danh sách đơn phù hợp kèm điểm và thứ hạng.</a:t>
             </a:r>
           </a:p>
           <a:p>
@@ -1075,7 +1075,7 @@
           <a:p>
             <a:r>
               <a:rPr sz="1200"/>
-              <a:t>CA 2 — ĐIỀU CHƯA BIẾT KHÔNG LOẠI AI. Một hồ sơ mới khai mỗi họ tên vẫn phải nhận được đơn phù hợp. Người chưa khai năm sinh không phải là người quá tuổi — đó là hai chuyện khác nhau. Nếu loại theo cái chưa biết thì hồ sơ điền một nửa sẽ ra không đơn nào, và giấu mất đơn thật sự hợp.</a:t>
+              <a:t>Lần 1 và lần 2: y nguyên đầu vào, gọi hai lần liên tiếp. Em không so bằng mắt mà đổi cả hai kết quả thành chuỗi văn bản rồi so từng ký tự — giống nhau tuyệt đối mới tính là đạt.</a:t>
             </a:r>
           </a:p>
           <a:p>
@@ -1087,7 +1087,7 @@
           <a:p>
             <a:r>
               <a:rPr sz="1200"/>
-              <a:t>CA 3 — RANH GIỚI HAI HỆ THỐNG. Phiên đăng nhập của ứng viên đem sang cửa quản trị phải bị từ chối, và ngược lại. Ràng buộc này nằm trong nội dung đã ký của phiếu đăng nhập, không phải ở giao diện.</a:t>
+              <a:t>Lần 3: đảo ngẫu nhiên thứ tự danh sách đơn rồi đối chiếu lại. Lý do phải kiểm điều này: cơ sở dữ liệu không cam kết trả về các đơn theo một thứ tự cố định — hôm nay trả DH-01 trước, mai có thể trả DH-05 trước. Nếu thứ tự đầu vào ảnh hưởng tới kết quả thì cùng một ứng viên, hỏi hai ngày khác nhau sẽ thấy hai danh sách khác nhau mà không ai hiểu vì sao.</a:t>
             </a:r>
           </a:p>
           <a:p>
@@ -1099,7 +1099,7 @@
           <a:p>
             <a:r>
               <a:rPr sz="1200"/>
-              <a:t>CA 4 — CÁCH LY DỮ LIỆU. Đổi mã hồ sơ trên thanh địa chỉ phải trả 404. Mọi truy vấn đều khóa theo mã khách hàng lấy từ phiên đăng nhập, không lấy từ tham số người gọi gửi lên.</a:t>
+              <a:t>'Giống hệt' nghĩa là: cùng những đơn đó, cùng số điểm đó, cùng thứ hạng đó, cùng lý do đạt hay không đạt cho từng tiêu chí.</a:t>
             </a:r>
           </a:p>
           <a:p>
@@ -1111,7 +1111,7 @@
           <a:p>
             <a:r>
               <a:rPr sz="1200"/>
-              <a:t>ĐIỂM CHUNG CỦA BỐN CA: mỗi cái đều trả lời câu 'nếu hỏng thì ai chịu thiệt'. Đó là lý do em chọn chúng thay vì bốn ca bất kỳ.</a:t>
+              <a:t>=== 'GIẢI TRÌNH ĐƯỢC' NGHĨA LÀ GÌ ===</a:t>
             </a:r>
           </a:p>
           <a:p>
@@ -1123,7 +1123,151 @@
           <a:p>
             <a:r>
               <a:rPr sz="1200"/>
-              <a:t>NẾU THẦY HỎI KIỂM THỬ NÀY CHỨNG MINH ĐƯỢC GÌ: nó chứng minh quy tắc chạy đúng như thiết kế. Nó KHÔNG chứng minh hệ thống chịu được tải thật, cũng không chứng minh chất lượng câu trả lời của trợ lý — phần đó phụ thuộc kho tài liệu và em đo riêng.</a:t>
+              <a:t>Là khi ứng viên hỏi 'vì sao em không được giới thiệu đơn này', nhân viên mở ra được một bảng mười một dòng: bảy điều kiện bắt buộc và bốn tiêu chí nguyện vọng. Mỗi dòng ghi đơn yêu cầu gì và hồ sơ có gì, kết quả là đạt, không đạt, hay chưa rõ.</a:t>
+            </a:r>
+          </a:p>
+          <a:p>
+            <a:r>
+              <a:rPr sz="1200"/>
+              <a:t/>
+            </a:r>
+          </a:p>
+          <a:p>
+            <a:r>
+              <a:rPr sz="1200"/>
+              <a:t>Tính tất định là điều kiện để làm được việc đó. Nếu mỗi lần chạy ra một kết quả khác thì bảng hôm nay không giải thích được quyết định hôm qua.</a:t>
+            </a:r>
+          </a:p>
+          <a:p>
+            <a:r>
+              <a:rPr sz="1200"/>
+              <a:t/>
+            </a:r>
+          </a:p>
+          <a:p>
+            <a:r>
+              <a:rPr sz="1200"/>
+              <a:t>=== CA 2 — HỒ SƠ CHỈ CÓ HỌ TÊN ===</a:t>
+            </a:r>
+          </a:p>
+          <a:p>
+            <a:r>
+              <a:rPr sz="1200"/>
+              <a:t/>
+            </a:r>
+          </a:p>
+          <a:p>
+            <a:r>
+              <a:rPr sz="1200"/>
+              <a:t>Đưa vào một hồ sơ bỏ trống gần hết: không năm sinh, không bằng cấp, không trình độ tiếng Nhật. Kết quả phải còn đơn đạt.</a:t>
+            </a:r>
+          </a:p>
+          <a:p>
+            <a:r>
+              <a:rPr sz="1200"/>
+              <a:t/>
+            </a:r>
+          </a:p>
+          <a:p>
+            <a:r>
+              <a:rPr sz="1200"/>
+              <a:t>Vì sao quan trọng: người chưa khai năm sinh không phải là người quá tuổi — đó là hai chuyện khác nhau. Nếu coi cái chưa biết là không đạt thì hồ sơ mới điền một nửa sẽ ra không đơn nào, và giấu mất đơn thật sự phù hợp với một người thật. Ca này còn kiểm thêm: các ô thiếu phải hiện thành câu hỏi gợi ý để hỏi tiếp, chứ không nằm trong danh sách lý do bị loại.</a:t>
+            </a:r>
+          </a:p>
+          <a:p>
+            <a:r>
+              <a:rPr sz="1200"/>
+              <a:t/>
+            </a:r>
+          </a:p>
+          <a:p>
+            <a:r>
+              <a:rPr sz="1200"/>
+              <a:t>=== CA 3 — PHIÊN ĐĂNG NHẬP ĐEM SANG NHẦM CỬA ===</a:t>
+            </a:r>
+          </a:p>
+          <a:p>
+            <a:r>
+              <a:rPr sz="1200"/>
+              <a:t/>
+            </a:r>
+          </a:p>
+          <a:p>
+            <a:r>
+              <a:rPr sz="1200"/>
+              <a:t>Hệ thống có hai loại tài khoản: ứng viên và nhân viên. Ca này lấy phiếu đăng nhập của ứng viên rồi thử gõ cửa màn hình quản trị. Phải bị từ chối.</a:t>
+            </a:r>
+          </a:p>
+          <a:p>
+            <a:r>
+              <a:rPr sz="1200"/>
+              <a:t/>
+            </a:r>
+          </a:p>
+          <a:p>
+            <a:r>
+              <a:rPr sz="1200"/>
+              <a:t>Chốt chặn nằm trong nội dung đã ký của phiếu đăng nhập chứ không phải ở giao diện — nên không thể lách bằng cách gọi thẳng vào máy chủ.</a:t>
+            </a:r>
+          </a:p>
+          <a:p>
+            <a:r>
+              <a:rPr sz="1200"/>
+              <a:t/>
+            </a:r>
+          </a:p>
+          <a:p>
+            <a:r>
+              <a:rPr sz="1200"/>
+              <a:t>=== CA 4 — ĐỔI MÃ TRÊN THANH ĐỊA CHỈ ===</a:t>
+            </a:r>
+          </a:p>
+          <a:p>
+            <a:r>
+              <a:rPr sz="1200"/>
+              <a:t/>
+            </a:r>
+          </a:p>
+          <a:p>
+            <a:r>
+              <a:rPr sz="1200"/>
+              <a:t>Ứng viên đang xem hồ sơ của mình, địa chỉ có dạng .../ho-so/HS-XXXX. Ca này thử sửa mã đó thành mã của người khác.</a:t>
+            </a:r>
+          </a:p>
+          <a:p>
+            <a:r>
+              <a:rPr sz="1200"/>
+              <a:t/>
+            </a:r>
+          </a:p>
+          <a:p>
+            <a:r>
+              <a:rPr sz="1200"/>
+              <a:t>Hệ thống phải báo không tìm thấy. Lý do: nó không tra thẳng theo mã rồi mới kiểm chủ sở hữu, mà lọc trước theo người đang đăng nhập rồi mới tìm mã trong đó. Hai cách cho cùng kết quả khi viết đúng, nhưng cách này thì viết sai cũng không lộ được hồ sơ người khác.</a:t>
+            </a:r>
+          </a:p>
+          <a:p>
+            <a:r>
+              <a:rPr sz="1200"/>
+              <a:t/>
+            </a:r>
+          </a:p>
+          <a:p>
+            <a:r>
+              <a:rPr sz="1200"/>
+              <a:t>=== NẾU THẦY HỎI KIỂM THỬ NÀY CHỨNG MINH ĐƯỢC GÌ ===</a:t>
+            </a:r>
+          </a:p>
+          <a:p>
+            <a:r>
+              <a:rPr sz="1200"/>
+              <a:t/>
+            </a:r>
+          </a:p>
+          <a:p>
+            <a:r>
+              <a:rPr sz="1200"/>
+              <a:t>Nó chứng minh quy tắc chạy đúng như thiết kế. Nó KHÔNG chứng minh hệ thống chịu được tải thật, cũng không chứng minh chất lượng câu trả lời của trợ lý — phần đó phụ thuộc kho tài liệu và em đo riêng.</a:t>
             </a:r>
           </a:p>
         </p:txBody>
@@ -6575,7 +6719,7 @@
         </p:nvGraphicFramePr>
         <p:xfrm>
           <a:off x="1333515" y="1286300"/>
-          <a:ext cx="9811840" cy="4704974"/>
+          <a:ext cx="9811841" cy="4704974"/>
         </p:xfrm>
         <a:graphic>
           <a:graphicData uri="http://schemas.openxmlformats.org/drawingml/2006/table">
@@ -6584,9 +6728,9 @@
                 <a:tableStyleId>{5C22544A-7EE6-4342-B048-85BDC9FD1C3A}</a:tableStyleId>
               </a:tblPr>
               <a:tblGrid>
-                <a:gridCol w="1668013"/>
-                <a:gridCol w="3728499"/>
-                <a:gridCol w="4415328"/>
+                <a:gridCol w="1471776"/>
+                <a:gridCol w="4317210"/>
+                <a:gridCol w="4022855"/>
               </a:tblGrid>
               <a:tr h="940994">
                 <a:tc>
@@ -6595,7 +6739,7 @@
                     <a:lstStyle/>
                     <a:p>
                       <a:r>
-                        <a:rPr sz="1500" b="1">
+                        <a:rPr sz="1400" b="1">
                           <a:solidFill>
                             <a:srgbClr val="1B1B1B"/>
                           </a:solidFill>
@@ -6613,13 +6757,13 @@
                     <a:lstStyle/>
                     <a:p>
                       <a:r>
-                        <a:rPr sz="1500" b="1">
+                        <a:rPr sz="1400" b="1">
                           <a:solidFill>
                             <a:srgbClr val="1B1B1B"/>
                           </a:solidFill>
                           <a:latin typeface="Times New Roman"/>
                         </a:rPr>
-                        <a:t>Ca tiêu biểu</a:t>
+                        <a:t>Đưa vào những gì</a:t>
                       </a:r>
                     </a:p>
                   </a:txBody>
@@ -6631,13 +6775,13 @@
                     <a:lstStyle/>
                     <a:p>
                       <a:r>
-                        <a:rPr sz="1500" b="1">
+                        <a:rPr sz="1400" b="1">
                           <a:solidFill>
                             <a:srgbClr val="1B1B1B"/>
                           </a:solidFill>
                           <a:latin typeface="Times New Roman"/>
                         </a:rPr>
-                        <a:t>Điều được bảo vệ</a:t>
+                        <a:t>Kết quả phải đúng như thế nào</a:t>
                       </a:r>
                     </a:p>
                   </a:txBody>
@@ -6651,7 +6795,7 @@
                     <a:lstStyle/>
                     <a:p>
                       <a:r>
-                        <a:rPr sz="1300" b="0">
+                        <a:rPr sz="1200" b="0">
                           <a:solidFill>
                             <a:srgbClr val="1B1B1B"/>
                           </a:solidFill>
@@ -6669,13 +6813,13 @@
                     <a:lstStyle/>
                     <a:p>
                       <a:r>
-                        <a:rPr sz="1300" b="0">
+                        <a:rPr sz="1200" b="0">
                           <a:solidFill>
                             <a:srgbClr val="555555"/>
                           </a:solidFill>
                           <a:latin typeface="Times New Roman"/>
                         </a:rPr>
-                        <a:t>Chạy hai lần, xáo trộn thứ tự đơn đầu vào</a:t>
+                        <a:t>Cùng một hồ sơ và cùng danh sách đơn, đối chiếu hai lần liên tiếp; rồi đảo thứ tự danh sách đơn và đối chiếu lần nữa</a:t>
                       </a:r>
                     </a:p>
                   </a:txBody>
@@ -6687,13 +6831,13 @@
                     <a:lstStyle/>
                     <a:p>
                       <a:r>
-                        <a:rPr sz="1300" b="0">
+                        <a:rPr sz="1200" b="0">
                           <a:solidFill>
                             <a:srgbClr val="555555"/>
                           </a:solidFill>
                           <a:latin typeface="Times New Roman"/>
                         </a:rPr>
-                        <a:t>Kết quả giống hệt từng byte — giải trình được</a:t>
+                        <a:t>Cả ba lần ra cùng một danh sách đơn, cùng số điểm, cùng thứ hạng</a:t>
                       </a:r>
                     </a:p>
                   </a:txBody>
@@ -6707,7 +6851,7 @@
                     <a:lstStyle/>
                     <a:p>
                       <a:r>
-                        <a:rPr sz="1300" b="0">
+                        <a:rPr sz="1200" b="0">
                           <a:solidFill>
                             <a:srgbClr val="1B1B1B"/>
                           </a:solidFill>
@@ -6725,13 +6869,13 @@
                     <a:lstStyle/>
                     <a:p>
                       <a:r>
-                        <a:rPr sz="1300" b="0">
+                        <a:rPr sz="1200" b="0">
                           <a:solidFill>
                             <a:srgbClr val="555555"/>
                           </a:solidFill>
                           <a:latin typeface="Times New Roman"/>
                         </a:rPr>
-                        <a:t>Hồ sơ mới khai mỗi họ tên</a:t>
+                        <a:t>Hồ sơ chỉ khai mỗi họ tên, bỏ trống năm sinh, bằng cấp, tiếng Nhật</a:t>
                       </a:r>
                     </a:p>
                   </a:txBody>
@@ -6743,13 +6887,13 @@
                     <a:lstStyle/>
                     <a:p>
                       <a:r>
-                        <a:rPr sz="1300" b="0">
+                        <a:rPr sz="1200" b="0">
                           <a:solidFill>
                             <a:srgbClr val="555555"/>
                           </a:solidFill>
                           <a:latin typeface="Times New Roman"/>
                         </a:rPr>
-                        <a:t>Vẫn nhận được đơn phù hợp — điều chưa biết không loại ai</a:t>
+                        <a:t>Vẫn còn đơn đạt; ô bỏ trống ghi “chưa rõ” và thành câu hỏi gợi ý, không thành lý do loại</a:t>
                       </a:r>
                     </a:p>
                   </a:txBody>
@@ -6763,7 +6907,7 @@
                     <a:lstStyle/>
                     <a:p>
                       <a:r>
-                        <a:rPr sz="1300" b="0">
+                        <a:rPr sz="1200" b="0">
                           <a:solidFill>
                             <a:srgbClr val="1B1B1B"/>
                           </a:solidFill>
@@ -6781,13 +6925,13 @@
                     <a:lstStyle/>
                     <a:p>
                       <a:r>
-                        <a:rPr sz="1300" b="0">
+                        <a:rPr sz="1200" b="0">
                           <a:solidFill>
                             <a:srgbClr val="555555"/>
                           </a:solidFill>
                           <a:latin typeface="Times New Roman"/>
                         </a:rPr>
-                        <a:t>Phiên của ứng viên đem sang cửa quản trị</a:t>
+                        <a:t>Lấy phiên đăng nhập của ứng viên, gọi vào màn hình quản trị</a:t>
                       </a:r>
                     </a:p>
                   </a:txBody>
@@ -6799,13 +6943,13 @@
                     <a:lstStyle/>
                     <a:p>
                       <a:r>
-                        <a:rPr sz="1300" b="0">
+                        <a:rPr sz="1200" b="0">
                           <a:solidFill>
                             <a:srgbClr val="555555"/>
                           </a:solidFill>
                           <a:latin typeface="Times New Roman"/>
                         </a:rPr>
-                        <a:t>Bị từ chối — hai hệ thống không dùng lẫn phiên</a:t>
+                        <a:t>Bị chặn ngay ở cửa — không xem được dữ liệu nội bộ</a:t>
                       </a:r>
                     </a:p>
                   </a:txBody>
@@ -6819,7 +6963,7 @@
                     <a:lstStyle/>
                     <a:p>
                       <a:r>
-                        <a:rPr sz="1300" b="0">
+                        <a:rPr sz="1200" b="0">
                           <a:solidFill>
                             <a:srgbClr val="1B1B1B"/>
                           </a:solidFill>
@@ -6837,13 +6981,13 @@
                     <a:lstStyle/>
                     <a:p>
                       <a:r>
-                        <a:rPr sz="1300" b="0">
+                        <a:rPr sz="1200" b="0">
                           <a:solidFill>
                             <a:srgbClr val="555555"/>
                           </a:solidFill>
                           <a:latin typeface="Times New Roman"/>
                         </a:rPr>
-                        <a:t>Đổi mã hồ sơ trên thanh địa chỉ</a:t>
+                        <a:t>Ứng viên đang xem hồ sơ mình, sửa mã trên thanh địa chỉ thành mã của người khác</a:t>
                       </a:r>
                     </a:p>
                   </a:txBody>
@@ -6855,13 +6999,13 @@
                     <a:lstStyle/>
                     <a:p>
                       <a:r>
-                        <a:rPr sz="1300" b="0">
+                        <a:rPr sz="1200" b="0">
                           <a:solidFill>
                             <a:srgbClr val="555555"/>
                           </a:solidFill>
                           <a:latin typeface="Times New Roman"/>
                         </a:rPr>
-                        <a:t>Trả về 404 — không đọc được hồ sơ người khác</a:t>
+                        <a:t>Báo không tìm thấy — chỉ tra trong hồ sơ thuộc về người đang đăng nhập</a:t>
                       </a:r>
                     </a:p>
                   </a:txBody>
